--- a/outputs/presentation-theme-actual-tests/jk-theme-compact-review.pptx
+++ b/outputs/presentation-theme-actual-tests/jk-theme-compact-review.pptx
@@ -2,13 +2,13 @@
 <file path=ppt/presentation.xml><?xml version="1.0" encoding="utf-8"?>
 <p:presentation xmlns:p="http://schemas.openxmlformats.org/presentationml/2006/main">
   <p:sldMasterIdLst>
-    <p:sldMasterId xmlns:r="http://schemas.openxmlformats.org/officeDocument/2006/relationships" id="2147483648" r:id="R186f6e77e126416e"/>
+    <p:sldMasterId xmlns:r="http://schemas.openxmlformats.org/officeDocument/2006/relationships" id="2147483648" r:id="R3b70bb89fa824e24"/>
   </p:sldMasterIdLst>
   <p:notesMasterIdLst>
-    <p:notesMasterId xmlns:r="http://schemas.openxmlformats.org/officeDocument/2006/relationships" r:id="R9e652d3088b24a44"/>
+    <p:notesMasterId xmlns:r="http://schemas.openxmlformats.org/officeDocument/2006/relationships" r:id="R8e0c67c40ae34565"/>
   </p:notesMasterIdLst>
   <p:sldIdLst>
-    <p:sldId xmlns:r="http://schemas.openxmlformats.org/officeDocument/2006/relationships" id="256" r:id="R7787ed70e6604933"/>
+    <p:sldId xmlns:r="http://schemas.openxmlformats.org/officeDocument/2006/relationships" id="256" r:id="Raed654accca8453e"/>
   </p:sldIdLst>
   <p:sldSz cx="9144000" cy="5143500"/>
   <p:notesSz cx="6858000" cy="9144000"/>
@@ -601,7 +601,7 @@
   </p:cSld>
   <p:clrMap bg1="lt1" tx1="dk1" bg2="lt2" tx2="dk2" accent1="accent1" accent2="accent2" accent3="accent3" accent4="accent4" accent5="accent5" accent6="accent6" hlink="hlink" folHlink="folHlink"/>
   <p:sldLayoutIdLst>
-    <p:sldLayoutId xmlns:r="http://schemas.openxmlformats.org/officeDocument/2006/relationships" id="2147483649" r:id="Rba416713c4174ce3"/>
+    <p:sldLayoutId xmlns:r="http://schemas.openxmlformats.org/officeDocument/2006/relationships" id="2147483649" r:id="R1a19761e46174304"/>
   </p:sldLayoutIdLst>
   <p:txStyles>
     <p:titleStyle>
@@ -1152,7 +1152,7 @@
           <p:cNvPr id="1" name="judgmentkit-section-header-label">
             <a:extLst xmlns:a="http://schemas.openxmlformats.org/drawingml/2006/main">
               <a:ext uri="{FF2B5EF4-FFF2-40B4-BE49-F238E27FC236}">
-                <a16:creationId xmlns:a16="http://schemas.microsoft.com/office/drawing/2014/main" id="{D4876E1D-8DCD-47F7-9E63-A2E04A3CBCDF}"/>
+                <a16:creationId xmlns:a16="http://schemas.microsoft.com/office/drawing/2014/main" id="{C365B9C4-A22D-4784-BD4B-5A9E2F3D3F8A}"/>
               </a:ext>
             </a:extLst>
           </p:cNvPr>
@@ -1192,7 +1192,7 @@
           <p:cNvPr id="2" name="judgmentkit-section-header-title">
             <a:extLst xmlns:a="http://schemas.openxmlformats.org/drawingml/2006/main">
               <a:ext uri="{FF2B5EF4-FFF2-40B4-BE49-F238E27FC236}">
-                <a16:creationId xmlns:a16="http://schemas.microsoft.com/office/drawing/2014/main" id="{D81F20D7-53A4-483C-A1FB-27BD64EDB3F6}"/>
+                <a16:creationId xmlns:a16="http://schemas.microsoft.com/office/drawing/2014/main" id="{EE6FFE86-26A9-4161-87EC-9B68C2544F1C}"/>
               </a:ext>
             </a:extLst>
           </p:cNvPr>
@@ -1232,7 +1232,7 @@
           <p:cNvPr id="3" name="judgmentkit-evidence-panel-surface">
             <a:extLst xmlns:a="http://schemas.openxmlformats.org/drawingml/2006/main">
               <a:ext uri="{FF2B5EF4-FFF2-40B4-BE49-F238E27FC236}">
-                <a16:creationId xmlns:a16="http://schemas.microsoft.com/office/drawing/2014/main" id="{AE53ACAB-9992-4709-832C-25AECBFC113F}"/>
+                <a16:creationId xmlns:a16="http://schemas.microsoft.com/office/drawing/2014/main" id="{EF51C22F-B9B7-4F1D-8F7B-2496AF08F458}"/>
               </a:ext>
             </a:extLst>
           </p:cNvPr>
@@ -1267,7 +1267,7 @@
           <p:cNvPr id="4" name="judgmentkit-evidence-panel-title">
             <a:extLst xmlns:a="http://schemas.openxmlformats.org/drawingml/2006/main">
               <a:ext uri="{FF2B5EF4-FFF2-40B4-BE49-F238E27FC236}">
-                <a16:creationId xmlns:a16="http://schemas.microsoft.com/office/drawing/2014/main" id="{5DC8F93F-8078-4085-8C67-2CF4B50E34AD}"/>
+                <a16:creationId xmlns:a16="http://schemas.microsoft.com/office/drawing/2014/main" id="{3714399A-3568-4697-BCF4-ED24BC79BDBF}"/>
               </a:ext>
             </a:extLst>
           </p:cNvPr>
@@ -1307,7 +1307,7 @@
           <p:cNvPr id="5" name="judgmentkit-evidence-panel-body">
             <a:extLst xmlns:a="http://schemas.openxmlformats.org/drawingml/2006/main">
               <a:ext uri="{FF2B5EF4-FFF2-40B4-BE49-F238E27FC236}">
-                <a16:creationId xmlns:a16="http://schemas.microsoft.com/office/drawing/2014/main" id="{196C33E5-8CEB-4BB6-8FA8-652ED8728D56}"/>
+                <a16:creationId xmlns:a16="http://schemas.microsoft.com/office/drawing/2014/main" id="{7BC12897-3E6A-45F0-94B0-AA1AF23C6BC0}"/>
               </a:ext>
             </a:extLst>
           </p:cNvPr>
@@ -1371,7 +1371,7 @@
           <p:cNvPr id="6" name="judgmentkit-risk-callout-surface">
             <a:extLst xmlns:a="http://schemas.openxmlformats.org/drawingml/2006/main">
               <a:ext uri="{FF2B5EF4-FFF2-40B4-BE49-F238E27FC236}">
-                <a16:creationId xmlns:a16="http://schemas.microsoft.com/office/drawing/2014/main" id="{90C9A690-DA01-4F0A-8748-4F6A44CDD5DB}"/>
+                <a16:creationId xmlns:a16="http://schemas.microsoft.com/office/drawing/2014/main" id="{8A3FBC88-7C2F-44E3-9FFA-7D8C4984449E}"/>
               </a:ext>
             </a:extLst>
           </p:cNvPr>
@@ -1406,7 +1406,7 @@
           <p:cNvPr id="7" name="judgmentkit-risk-callout-title">
             <a:extLst xmlns:a="http://schemas.openxmlformats.org/drawingml/2006/main">
               <a:ext uri="{FF2B5EF4-FFF2-40B4-BE49-F238E27FC236}">
-                <a16:creationId xmlns:a16="http://schemas.microsoft.com/office/drawing/2014/main" id="{77EFA9A0-C1E1-4A7A-8368-F4D208301747}"/>
+                <a16:creationId xmlns:a16="http://schemas.microsoft.com/office/drawing/2014/main" id="{521D062E-F03F-4B95-B33B-4E7DBCC223B0}"/>
               </a:ext>
             </a:extLst>
           </p:cNvPr>
@@ -1446,7 +1446,7 @@
           <p:cNvPr id="8" name="judgmentkit-risk-callout-body">
             <a:extLst xmlns:a="http://schemas.openxmlformats.org/drawingml/2006/main">
               <a:ext uri="{FF2B5EF4-FFF2-40B4-BE49-F238E27FC236}">
-                <a16:creationId xmlns:a16="http://schemas.microsoft.com/office/drawing/2014/main" id="{987A386E-200F-404E-B08C-79EFE621087D}"/>
+                <a16:creationId xmlns:a16="http://schemas.microsoft.com/office/drawing/2014/main" id="{2FF18838-2609-4AC8-BCE3-4F4B9CE9EBB0}"/>
               </a:ext>
             </a:extLst>
           </p:cNvPr>
@@ -1498,7 +1498,7 @@
           <p:cNvPr id="9" name="judgmentkit-status-pill-surface">
             <a:extLst xmlns:a="http://schemas.openxmlformats.org/drawingml/2006/main">
               <a:ext uri="{FF2B5EF4-FFF2-40B4-BE49-F238E27FC236}">
-                <a16:creationId xmlns:a16="http://schemas.microsoft.com/office/drawing/2014/main" id="{532C3DD5-6C82-4192-B554-1E6AB56972C3}"/>
+                <a16:creationId xmlns:a16="http://schemas.microsoft.com/office/drawing/2014/main" id="{55768FBF-0B10-4E62-8AB2-599AD28ECB5C}"/>
               </a:ext>
             </a:extLst>
           </p:cNvPr>
@@ -1533,7 +1533,7 @@
           <p:cNvPr id="10" name="judgmentkit-status-pill-label">
             <a:extLst xmlns:a="http://schemas.openxmlformats.org/drawingml/2006/main">
               <a:ext uri="{FF2B5EF4-FFF2-40B4-BE49-F238E27FC236}">
-                <a16:creationId xmlns:a16="http://schemas.microsoft.com/office/drawing/2014/main" id="{AB69DDB7-7D6C-4D74-ADFA-E4CB945A1691}"/>
+                <a16:creationId xmlns:a16="http://schemas.microsoft.com/office/drawing/2014/main" id="{4F1EE5A7-C6B1-4B4C-B263-6034EFFA15A3}"/>
               </a:ext>
             </a:extLst>
           </p:cNvPr>
@@ -1573,7 +1573,7 @@
           <p:cNvPr id="11" name="judgmentkit-handoff-receipt-surface">
             <a:extLst xmlns:a="http://schemas.openxmlformats.org/drawingml/2006/main">
               <a:ext uri="{FF2B5EF4-FFF2-40B4-BE49-F238E27FC236}">
-                <a16:creationId xmlns:a16="http://schemas.microsoft.com/office/drawing/2014/main" id="{82E209C9-57A7-4981-AAB1-D68FEDB33AF2}"/>
+                <a16:creationId xmlns:a16="http://schemas.microsoft.com/office/drawing/2014/main" id="{DCC49BA9-5668-406F-9686-7ADC40A6CD55}"/>
               </a:ext>
             </a:extLst>
           </p:cNvPr>
@@ -1608,7 +1608,7 @@
           <p:cNvPr id="12" name="judgmentkit-handoff-receipt-title">
             <a:extLst xmlns:a="http://schemas.openxmlformats.org/drawingml/2006/main">
               <a:ext uri="{FF2B5EF4-FFF2-40B4-BE49-F238E27FC236}">
-                <a16:creationId xmlns:a16="http://schemas.microsoft.com/office/drawing/2014/main" id="{FD337B61-C6C3-421B-A657-E889C198C5CD}"/>
+                <a16:creationId xmlns:a16="http://schemas.microsoft.com/office/drawing/2014/main" id="{4E21C371-8229-4608-90B0-2746CD849AF8}"/>
               </a:ext>
             </a:extLst>
           </p:cNvPr>
@@ -1648,7 +1648,7 @@
           <p:cNvPr id="13" name="judgmentkit-handoff-receipt-body">
             <a:extLst xmlns:a="http://schemas.openxmlformats.org/drawingml/2006/main">
               <a:ext uri="{FF2B5EF4-FFF2-40B4-BE49-F238E27FC236}">
-                <a16:creationId xmlns:a16="http://schemas.microsoft.com/office/drawing/2014/main" id="{F8E22ED8-F203-4C68-9FBC-4C660EC355BC}"/>
+                <a16:creationId xmlns:a16="http://schemas.microsoft.com/office/drawing/2014/main" id="{100B6990-1AF4-4B8D-972E-6AB62FDD109C}"/>
               </a:ext>
             </a:extLst>
           </p:cNvPr>
@@ -1686,7 +1686,7 @@
     </p:spTree>
     <p:extLst>
       <p:ext uri="{BB962C8B-B14F-4D97-AF65-F5344CB8AC3E}">
-        <p14:creationId xmlns:p14="http://schemas.microsoft.com/office/powerpoint/2010/main" val="941638558"/>
+        <p14:creationId xmlns:p14="http://schemas.microsoft.com/office/powerpoint/2010/main" val="84168619"/>
       </p:ext>
     </p:extLst>
   </p:cSld>

--- a/outputs/presentation-theme-actual-tests/jk-theme-compact-review.pptx
+++ b/outputs/presentation-theme-actual-tests/jk-theme-compact-review.pptx
@@ -2,13 +2,13 @@
 <file path=ppt/presentation.xml><?xml version="1.0" encoding="utf-8"?>
 <p:presentation xmlns:p="http://schemas.openxmlformats.org/presentationml/2006/main">
   <p:sldMasterIdLst>
-    <p:sldMasterId xmlns:r="http://schemas.openxmlformats.org/officeDocument/2006/relationships" id="2147483648" r:id="R3b70bb89fa824e24"/>
+    <p:sldMasterId xmlns:r="http://schemas.openxmlformats.org/officeDocument/2006/relationships" id="2147483648" r:id="R61d0b801a8d24c38"/>
   </p:sldMasterIdLst>
   <p:notesMasterIdLst>
-    <p:notesMasterId xmlns:r="http://schemas.openxmlformats.org/officeDocument/2006/relationships" r:id="R8e0c67c40ae34565"/>
+    <p:notesMasterId xmlns:r="http://schemas.openxmlformats.org/officeDocument/2006/relationships" r:id="R362d068b357d4e25"/>
   </p:notesMasterIdLst>
   <p:sldIdLst>
-    <p:sldId xmlns:r="http://schemas.openxmlformats.org/officeDocument/2006/relationships" id="256" r:id="Raed654accca8453e"/>
+    <p:sldId xmlns:r="http://schemas.openxmlformats.org/officeDocument/2006/relationships" id="256" r:id="Rc7fe834c60a940f7"/>
   </p:sldIdLst>
   <p:sldSz cx="9144000" cy="5143500"/>
   <p:notesSz cx="6858000" cy="9144000"/>
@@ -260,19 +260,19 @@
         <a:srgbClr val="171717"/>
       </a:dk1>
       <a:lt1>
-        <a:srgbClr val="F8F7F2"/>
+        <a:srgbClr val="FFFFFF"/>
       </a:lt1>
       <a:dk2>
-        <a:srgbClr val="61615C"/>
+        <a:srgbClr val="666666"/>
       </a:dk2>
       <a:lt2>
-        <a:srgbClr val="FFFFFF"/>
+        <a:srgbClr val="F4F4F4"/>
       </a:lt2>
       <a:accent1>
-        <a:srgbClr val="245F73"/>
+        <a:srgbClr val="156082"/>
       </a:accent1>
       <a:accent2>
-        <a:srgbClr val="23615F"/>
+        <a:srgbClr val="467886"/>
       </a:accent2>
       <a:accent3>
         <a:srgbClr val="2E6B48"/>
@@ -284,13 +284,13 @@
         <a:srgbClr val="8F342F"/>
       </a:accent5>
       <a:accent6>
-        <a:srgbClr val="D7D3C8"/>
+        <a:srgbClr val="D9D9D9"/>
       </a:accent6>
       <a:hlink>
-        <a:srgbClr val="245F73"/>
+        <a:srgbClr val="156082"/>
       </a:hlink>
       <a:folHlink>
-        <a:srgbClr val="23615F"/>
+        <a:srgbClr val="467886"/>
       </a:folHlink>
     </a:clrScheme>
     <a:fontScheme name="Office">
@@ -601,7 +601,7 @@
   </p:cSld>
   <p:clrMap bg1="lt1" tx1="dk1" bg2="lt2" tx2="dk2" accent1="accent1" accent2="accent2" accent3="accent3" accent4="accent4" accent5="accent5" accent6="accent6" hlink="hlink" folHlink="folHlink"/>
   <p:sldLayoutIdLst>
-    <p:sldLayoutId xmlns:r="http://schemas.openxmlformats.org/officeDocument/2006/relationships" id="2147483649" r:id="R1a19761e46174304"/>
+    <p:sldLayoutId xmlns:r="http://schemas.openxmlformats.org/officeDocument/2006/relationships" id="2147483649" r:id="R5f24f40807334106"/>
   </p:sldLayoutIdLst>
   <p:txStyles>
     <p:titleStyle>
@@ -891,19 +891,19 @@
         <a:srgbClr val="171717"/>
       </a:dk1>
       <a:lt1>
-        <a:srgbClr val="F8F7F2"/>
+        <a:srgbClr val="FFFFFF"/>
       </a:lt1>
       <a:dk2>
-        <a:srgbClr val="61615C"/>
+        <a:srgbClr val="666666"/>
       </a:dk2>
       <a:lt2>
-        <a:srgbClr val="FFFFFF"/>
+        <a:srgbClr val="F4F4F4"/>
       </a:lt2>
       <a:accent1>
-        <a:srgbClr val="245F73"/>
+        <a:srgbClr val="156082"/>
       </a:accent1>
       <a:accent2>
-        <a:srgbClr val="23615F"/>
+        <a:srgbClr val="467886"/>
       </a:accent2>
       <a:accent3>
         <a:srgbClr val="2E6B48"/>
@@ -915,13 +915,13 @@
         <a:srgbClr val="8F342F"/>
       </a:accent5>
       <a:accent6>
-        <a:srgbClr val="D7D3C8"/>
+        <a:srgbClr val="D9D9D9"/>
       </a:accent6>
       <a:hlink>
-        <a:srgbClr val="245F73"/>
+        <a:srgbClr val="156082"/>
       </a:hlink>
       <a:folHlink>
-        <a:srgbClr val="23615F"/>
+        <a:srgbClr val="467886"/>
       </a:folHlink>
     </a:clrScheme>
     <a:fontScheme name="Office">
@@ -1152,7 +1152,7 @@
           <p:cNvPr id="1" name="judgmentkit-section-header-label">
             <a:extLst xmlns:a="http://schemas.openxmlformats.org/drawingml/2006/main">
               <a:ext uri="{FF2B5EF4-FFF2-40B4-BE49-F238E27FC236}">
-                <a16:creationId xmlns:a16="http://schemas.microsoft.com/office/drawing/2014/main" id="{C365B9C4-A22D-4784-BD4B-5A9E2F3D3F8A}"/>
+                <a16:creationId xmlns:a16="http://schemas.microsoft.com/office/drawing/2014/main" id="{591F20A1-9342-4925-B268-77AA700C88E3}"/>
               </a:ext>
             </a:extLst>
           </p:cNvPr>
@@ -1192,7 +1192,7 @@
           <p:cNvPr id="2" name="judgmentkit-section-header-title">
             <a:extLst xmlns:a="http://schemas.openxmlformats.org/drawingml/2006/main">
               <a:ext uri="{FF2B5EF4-FFF2-40B4-BE49-F238E27FC236}">
-                <a16:creationId xmlns:a16="http://schemas.microsoft.com/office/drawing/2014/main" id="{EE6FFE86-26A9-4161-87EC-9B68C2544F1C}"/>
+                <a16:creationId xmlns:a16="http://schemas.microsoft.com/office/drawing/2014/main" id="{7974BF4A-DB03-42E0-958E-7E7D1ECFAB1D}"/>
               </a:ext>
             </a:extLst>
           </p:cNvPr>
@@ -1204,7 +1204,7 @@
         <p:spPr>
           <a:xfrm xmlns:a="http://schemas.openxmlformats.org/drawingml/2006/main">
             <a:off x="685800" y="685800"/>
-            <a:ext cx="7772400" cy="552450"/>
+            <a:ext cx="7772400" cy="476250"/>
           </a:xfrm>
           <a:prstGeom xmlns:a="http://schemas.openxmlformats.org/drawingml/2006/main" prst="rect">
             <a:avLst/>
@@ -1232,7 +1232,7 @@
           <p:cNvPr id="3" name="judgmentkit-evidence-panel-surface">
             <a:extLst xmlns:a="http://schemas.openxmlformats.org/drawingml/2006/main">
               <a:ext uri="{FF2B5EF4-FFF2-40B4-BE49-F238E27FC236}">
-                <a16:creationId xmlns:a16="http://schemas.microsoft.com/office/drawing/2014/main" id="{EF51C22F-B9B7-4F1D-8F7B-2496AF08F458}"/>
+                <a16:creationId xmlns:a16="http://schemas.microsoft.com/office/drawing/2014/main" id="{DB6BAC6C-F82B-4E23-8F14-B31EE9BD79DD}"/>
               </a:ext>
             </a:extLst>
           </p:cNvPr>
@@ -1267,7 +1267,7 @@
           <p:cNvPr id="4" name="judgmentkit-evidence-panel-title">
             <a:extLst xmlns:a="http://schemas.openxmlformats.org/drawingml/2006/main">
               <a:ext uri="{FF2B5EF4-FFF2-40B4-BE49-F238E27FC236}">
-                <a16:creationId xmlns:a16="http://schemas.microsoft.com/office/drawing/2014/main" id="{3714399A-3568-4697-BCF4-ED24BC79BDBF}"/>
+                <a16:creationId xmlns:a16="http://schemas.microsoft.com/office/drawing/2014/main" id="{29AC1229-CEFA-4D90-92DF-D906D4B2B7C4}"/>
               </a:ext>
             </a:extLst>
           </p:cNvPr>
@@ -1307,7 +1307,7 @@
           <p:cNvPr id="5" name="judgmentkit-evidence-panel-body">
             <a:extLst xmlns:a="http://schemas.openxmlformats.org/drawingml/2006/main">
               <a:ext uri="{FF2B5EF4-FFF2-40B4-BE49-F238E27FC236}">
-                <a16:creationId xmlns:a16="http://schemas.microsoft.com/office/drawing/2014/main" id="{7BC12897-3E6A-45F0-94B0-AA1AF23C6BC0}"/>
+                <a16:creationId xmlns:a16="http://schemas.microsoft.com/office/drawing/2014/main" id="{95AA8A5A-7EB0-466F-ACE4-76A164066436}"/>
               </a:ext>
             </a:extLst>
           </p:cNvPr>
@@ -1371,7 +1371,7 @@
           <p:cNvPr id="6" name="judgmentkit-risk-callout-surface">
             <a:extLst xmlns:a="http://schemas.openxmlformats.org/drawingml/2006/main">
               <a:ext uri="{FF2B5EF4-FFF2-40B4-BE49-F238E27FC236}">
-                <a16:creationId xmlns:a16="http://schemas.microsoft.com/office/drawing/2014/main" id="{8A3FBC88-7C2F-44E3-9FFA-7D8C4984449E}"/>
+                <a16:creationId xmlns:a16="http://schemas.microsoft.com/office/drawing/2014/main" id="{EB163A34-EC91-4DB8-8A6A-E6B14119E37F}"/>
               </a:ext>
             </a:extLst>
           </p:cNvPr>
@@ -1406,7 +1406,7 @@
           <p:cNvPr id="7" name="judgmentkit-risk-callout-title">
             <a:extLst xmlns:a="http://schemas.openxmlformats.org/drawingml/2006/main">
               <a:ext uri="{FF2B5EF4-FFF2-40B4-BE49-F238E27FC236}">
-                <a16:creationId xmlns:a16="http://schemas.microsoft.com/office/drawing/2014/main" id="{521D062E-F03F-4B95-B33B-4E7DBCC223B0}"/>
+                <a16:creationId xmlns:a16="http://schemas.microsoft.com/office/drawing/2014/main" id="{3DBC7FAF-2316-48AE-91D6-1B8E35D9164F}"/>
               </a:ext>
             </a:extLst>
           </p:cNvPr>
@@ -1446,7 +1446,7 @@
           <p:cNvPr id="8" name="judgmentkit-risk-callout-body">
             <a:extLst xmlns:a="http://schemas.openxmlformats.org/drawingml/2006/main">
               <a:ext uri="{FF2B5EF4-FFF2-40B4-BE49-F238E27FC236}">
-                <a16:creationId xmlns:a16="http://schemas.microsoft.com/office/drawing/2014/main" id="{2FF18838-2609-4AC8-BCE3-4F4B9CE9EBB0}"/>
+                <a16:creationId xmlns:a16="http://schemas.microsoft.com/office/drawing/2014/main" id="{05546A14-F980-4D9F-BD1C-B1E37986BD34}"/>
               </a:ext>
             </a:extLst>
           </p:cNvPr>
@@ -1498,7 +1498,7 @@
           <p:cNvPr id="9" name="judgmentkit-status-pill-surface">
             <a:extLst xmlns:a="http://schemas.openxmlformats.org/drawingml/2006/main">
               <a:ext uri="{FF2B5EF4-FFF2-40B4-BE49-F238E27FC236}">
-                <a16:creationId xmlns:a16="http://schemas.microsoft.com/office/drawing/2014/main" id="{55768FBF-0B10-4E62-8AB2-599AD28ECB5C}"/>
+                <a16:creationId xmlns:a16="http://schemas.microsoft.com/office/drawing/2014/main" id="{37A0EBD5-7AEE-4E19-BDBA-72E3746E5714}"/>
               </a:ext>
             </a:extLst>
           </p:cNvPr>
@@ -1533,7 +1533,7 @@
           <p:cNvPr id="10" name="judgmentkit-status-pill-label">
             <a:extLst xmlns:a="http://schemas.openxmlformats.org/drawingml/2006/main">
               <a:ext uri="{FF2B5EF4-FFF2-40B4-BE49-F238E27FC236}">
-                <a16:creationId xmlns:a16="http://schemas.microsoft.com/office/drawing/2014/main" id="{4F1EE5A7-C6B1-4B4C-B263-6034EFFA15A3}"/>
+                <a16:creationId xmlns:a16="http://schemas.microsoft.com/office/drawing/2014/main" id="{3D3768C1-4B22-4980-B6A0-72B641A141FF}"/>
               </a:ext>
             </a:extLst>
           </p:cNvPr>
@@ -1573,7 +1573,7 @@
           <p:cNvPr id="11" name="judgmentkit-handoff-receipt-surface">
             <a:extLst xmlns:a="http://schemas.openxmlformats.org/drawingml/2006/main">
               <a:ext uri="{FF2B5EF4-FFF2-40B4-BE49-F238E27FC236}">
-                <a16:creationId xmlns:a16="http://schemas.microsoft.com/office/drawing/2014/main" id="{DCC49BA9-5668-406F-9686-7ADC40A6CD55}"/>
+                <a16:creationId xmlns:a16="http://schemas.microsoft.com/office/drawing/2014/main" id="{B4D76092-3066-4B3F-BD5E-FDF7471CCD92}"/>
               </a:ext>
             </a:extLst>
           </p:cNvPr>
@@ -1608,7 +1608,7 @@
           <p:cNvPr id="12" name="judgmentkit-handoff-receipt-title">
             <a:extLst xmlns:a="http://schemas.openxmlformats.org/drawingml/2006/main">
               <a:ext uri="{FF2B5EF4-FFF2-40B4-BE49-F238E27FC236}">
-                <a16:creationId xmlns:a16="http://schemas.microsoft.com/office/drawing/2014/main" id="{4E21C371-8229-4608-90B0-2746CD849AF8}"/>
+                <a16:creationId xmlns:a16="http://schemas.microsoft.com/office/drawing/2014/main" id="{BED1D8C6-0F15-41F0-A25B-540BFD34ACB1}"/>
               </a:ext>
             </a:extLst>
           </p:cNvPr>
@@ -1648,7 +1648,7 @@
           <p:cNvPr id="13" name="judgmentkit-handoff-receipt-body">
             <a:extLst xmlns:a="http://schemas.openxmlformats.org/drawingml/2006/main">
               <a:ext uri="{FF2B5EF4-FFF2-40B4-BE49-F238E27FC236}">
-                <a16:creationId xmlns:a16="http://schemas.microsoft.com/office/drawing/2014/main" id="{100B6990-1AF4-4B8D-972E-6AB62FDD109C}"/>
+                <a16:creationId xmlns:a16="http://schemas.microsoft.com/office/drawing/2014/main" id="{D0F92DAE-8A9F-4071-AD43-2618E17D90F6}"/>
               </a:ext>
             </a:extLst>
           </p:cNvPr>
@@ -1686,7 +1686,7 @@
     </p:spTree>
     <p:extLst>
       <p:ext uri="{BB962C8B-B14F-4D97-AF65-F5344CB8AC3E}">
-        <p14:creationId xmlns:p14="http://schemas.microsoft.com/office/powerpoint/2010/main" val="84168619"/>
+        <p14:creationId xmlns:p14="http://schemas.microsoft.com/office/powerpoint/2010/main" val="2098365051"/>
       </p:ext>
     </p:extLst>
   </p:cSld>
@@ -1701,19 +1701,19 @@
         <a:srgbClr val="171717"/>
       </a:dk1>
       <a:lt1>
-        <a:srgbClr val="F8F7F2"/>
+        <a:srgbClr val="FFFFFF"/>
       </a:lt1>
       <a:dk2>
-        <a:srgbClr val="61615C"/>
+        <a:srgbClr val="666666"/>
       </a:dk2>
       <a:lt2>
-        <a:srgbClr val="FFFFFF"/>
+        <a:srgbClr val="F4F4F4"/>
       </a:lt2>
       <a:accent1>
-        <a:srgbClr val="245F73"/>
+        <a:srgbClr val="156082"/>
       </a:accent1>
       <a:accent2>
-        <a:srgbClr val="23615F"/>
+        <a:srgbClr val="467886"/>
       </a:accent2>
       <a:accent3>
         <a:srgbClr val="2E6B48"/>
@@ -1725,13 +1725,13 @@
         <a:srgbClr val="8F342F"/>
       </a:accent5>
       <a:accent6>
-        <a:srgbClr val="D7D3C8"/>
+        <a:srgbClr val="D9D9D9"/>
       </a:accent6>
       <a:hlink>
-        <a:srgbClr val="245F73"/>
+        <a:srgbClr val="156082"/>
       </a:hlink>
       <a:folHlink>
-        <a:srgbClr val="23615F"/>
+        <a:srgbClr val="467886"/>
       </a:folHlink>
     </a:clrScheme>
     <a:fontScheme name="Office">
